--- a/m3/diapositivos/sessao-01-m3-f02.pptx
+++ b/m3/diapositivos/sessao-01-m3-f02.pptx
@@ -2516,7 +2516,41 @@
                 <a:ea typeface="Arial" pitchFamily="34" charset="-122"/>
                 <a:cs typeface="Arial" pitchFamily="34" charset="-120"/>
               </a:rPr>
-              <a:t>Os objetos do Kit, do Frasquinho de Mar Português à Sebastiana, fazem rir para deixar à vista o que a celebração cala.</a:t>
+              <a:t>Os objetos do </a:t>
+            </a:r>
+            <a:pPr indent="0" marL="0">
+              <a:lnSpc>
+                <a:spcPct val="105000"/>
+              </a:lnSpc>
+              <a:buNone/>
+            </a:pPr>
+            <a:r>
+              <a:rPr lang="en-US" sz="2200" i="1" dirty="0">
+                <a:solidFill>
+                  <a:srgbClr val="F2F0EA"/>
+                </a:solidFill>
+                <a:latin typeface="Arial" pitchFamily="34" charset="0"/>
+                <a:ea typeface="Arial" pitchFamily="34" charset="-122"/>
+                <a:cs typeface="Arial" pitchFamily="34" charset="-120"/>
+              </a:rPr>
+              <a:t>Kit</a:t>
+            </a:r>
+            <a:pPr indent="0" marL="0">
+              <a:lnSpc>
+                <a:spcPct val="105000"/>
+              </a:lnSpc>
+              <a:buNone/>
+            </a:pPr>
+            <a:r>
+              <a:rPr lang="en-US" sz="2200" dirty="0">
+                <a:solidFill>
+                  <a:srgbClr val="F2F0EA"/>
+                </a:solidFill>
+                <a:latin typeface="Arial" pitchFamily="34" charset="0"/>
+                <a:ea typeface="Arial" pitchFamily="34" charset="-122"/>
+                <a:cs typeface="Arial" pitchFamily="34" charset="-120"/>
+              </a:rPr>
+              <a:t>, do Frasquinho de Mar Português à Sebastiana, fazem rir para deixar à vista o que a celebração cala.</a:t>
             </a:r>
             <a:endParaRPr lang="en-US" sz="2200" dirty="0"/>
           </a:p>
@@ -4355,7 +4389,35 @@
                 <a:ea typeface="Arial" pitchFamily="34" charset="-122"/>
                 <a:cs typeface="Arial" pitchFamily="34" charset="-120"/>
               </a:rPr>
-              <a:t>Luís de Camões, Os Lusíadas (1572), I, 1 a 3 (grafia modernizada).</a:t>
+              <a:t>Luís de Camões, </a:t>
+            </a:r>
+            <a:pPr indent="0" marL="0">
+              <a:buNone/>
+            </a:pPr>
+            <a:r>
+              <a:rPr lang="en-US" sz="1200" i="1" dirty="0">
+                <a:solidFill>
+                  <a:srgbClr val="A9A79F"/>
+                </a:solidFill>
+                <a:latin typeface="Arial" pitchFamily="34" charset="0"/>
+                <a:ea typeface="Arial" pitchFamily="34" charset="-122"/>
+                <a:cs typeface="Arial" pitchFamily="34" charset="-120"/>
+              </a:rPr>
+              <a:t>Os Lusíadas</a:t>
+            </a:r>
+            <a:pPr indent="0" marL="0">
+              <a:buNone/>
+            </a:pPr>
+            <a:r>
+              <a:rPr lang="en-US" sz="1200" dirty="0">
+                <a:solidFill>
+                  <a:srgbClr val="A9A79F"/>
+                </a:solidFill>
+                <a:latin typeface="Arial" pitchFamily="34" charset="0"/>
+                <a:ea typeface="Arial" pitchFamily="34" charset="-122"/>
+                <a:cs typeface="Arial" pitchFamily="34" charset="-120"/>
+              </a:rPr>
+              <a:t> (1572), I, 1 a 3 (grafia modernizada).</a:t>
             </a:r>
             <a:endParaRPr lang="en-US" sz="1200" dirty="0"/>
           </a:p>
@@ -4835,7 +4897,35 @@
                 <a:ea typeface="Arial" pitchFamily="34" charset="-122"/>
                 <a:cs typeface="Arial" pitchFamily="34" charset="-120"/>
               </a:rPr>
-              <a:t>Luís de Camões, Os Lusíadas (1572), I, 1 a 3 (grafia modernizada).</a:t>
+              <a:t>Luís de Camões, </a:t>
+            </a:r>
+            <a:pPr indent="0" marL="0">
+              <a:buNone/>
+            </a:pPr>
+            <a:r>
+              <a:rPr lang="en-US" sz="1200" i="1" dirty="0">
+                <a:solidFill>
+                  <a:srgbClr val="A9A79F"/>
+                </a:solidFill>
+                <a:latin typeface="Arial" pitchFamily="34" charset="0"/>
+                <a:ea typeface="Arial" pitchFamily="34" charset="-122"/>
+                <a:cs typeface="Arial" pitchFamily="34" charset="-120"/>
+              </a:rPr>
+              <a:t>Os Lusíadas</a:t>
+            </a:r>
+            <a:pPr indent="0" marL="0">
+              <a:buNone/>
+            </a:pPr>
+            <a:r>
+              <a:rPr lang="en-US" sz="1200" dirty="0">
+                <a:solidFill>
+                  <a:srgbClr val="A9A79F"/>
+                </a:solidFill>
+                <a:latin typeface="Arial" pitchFamily="34" charset="0"/>
+                <a:ea typeface="Arial" pitchFamily="34" charset="-122"/>
+                <a:cs typeface="Arial" pitchFamily="34" charset="-120"/>
+              </a:rPr>
+              <a:t> (1572), I, 1 a 3 (grafia modernizada).</a:t>
             </a:r>
             <a:endParaRPr lang="en-US" sz="1200" dirty="0"/>
           </a:p>
@@ -5242,7 +5332,41 @@
                 <a:ea typeface="Arial" pitchFamily="34" charset="-122"/>
                 <a:cs typeface="Arial" pitchFamily="34" charset="-120"/>
               </a:rPr>
-              <a:t>Em 1498 os portugueses chegaram à Índia; Patrícia Lino, poeta nascida no Porto em 1990, publicou em 2020 um Kit que pergunta quem conta essa história.</a:t>
+              <a:t>Em 1498 os portugueses chegaram à Índia; Patrícia Lino, poeta nascida no Porto em 1990, publicou em 2020 um </a:t>
+            </a:r>
+            <a:pPr indent="0" marL="0">
+              <a:lnSpc>
+                <a:spcPct val="105000"/>
+              </a:lnSpc>
+              <a:buNone/>
+            </a:pPr>
+            <a:r>
+              <a:rPr lang="en-US" sz="2200" i="1" dirty="0">
+                <a:solidFill>
+                  <a:srgbClr val="F2F0EA"/>
+                </a:solidFill>
+                <a:latin typeface="Arial" pitchFamily="34" charset="0"/>
+                <a:ea typeface="Arial" pitchFamily="34" charset="-122"/>
+                <a:cs typeface="Arial" pitchFamily="34" charset="-120"/>
+              </a:rPr>
+              <a:t>Kit</a:t>
+            </a:r>
+            <a:pPr indent="0" marL="0">
+              <a:lnSpc>
+                <a:spcPct val="105000"/>
+              </a:lnSpc>
+              <a:buNone/>
+            </a:pPr>
+            <a:r>
+              <a:rPr lang="en-US" sz="2200" dirty="0">
+                <a:solidFill>
+                  <a:srgbClr val="F2F0EA"/>
+                </a:solidFill>
+                <a:latin typeface="Arial" pitchFamily="34" charset="0"/>
+                <a:ea typeface="Arial" pitchFamily="34" charset="-122"/>
+                <a:cs typeface="Arial" pitchFamily="34" charset="-120"/>
+              </a:rPr>
+              <a:t> que pergunta quem conta essa história.</a:t>
             </a:r>
             <a:endParaRPr lang="en-US" sz="2200" dirty="0"/>
           </a:p>
@@ -5350,7 +5474,75 @@
                 <a:ea typeface="Arial" pitchFamily="34" charset="-122"/>
                 <a:cs typeface="Arial" pitchFamily="34" charset="-120"/>
               </a:rPr>
-              <a:t>A Proposição de Os Lusíadas (I, 1 a 3) canta «os barões assinalados»; o Kit, com objetos inventados e ironia, mostra quem fica sem nome nem voz.</a:t>
+              <a:t>A Proposição de </a:t>
+            </a:r>
+            <a:pPr indent="0" marL="0">
+              <a:lnSpc>
+                <a:spcPct val="105000"/>
+              </a:lnSpc>
+              <a:buNone/>
+            </a:pPr>
+            <a:r>
+              <a:rPr lang="en-US" sz="2200" i="1" dirty="0">
+                <a:solidFill>
+                  <a:srgbClr val="F2F0EA"/>
+                </a:solidFill>
+                <a:latin typeface="Arial" pitchFamily="34" charset="0"/>
+                <a:ea typeface="Arial" pitchFamily="34" charset="-122"/>
+                <a:cs typeface="Arial" pitchFamily="34" charset="-120"/>
+              </a:rPr>
+              <a:t>Os Lusíadas</a:t>
+            </a:r>
+            <a:pPr indent="0" marL="0">
+              <a:lnSpc>
+                <a:spcPct val="105000"/>
+              </a:lnSpc>
+              <a:buNone/>
+            </a:pPr>
+            <a:r>
+              <a:rPr lang="en-US" sz="2200" dirty="0">
+                <a:solidFill>
+                  <a:srgbClr val="F2F0EA"/>
+                </a:solidFill>
+                <a:latin typeface="Arial" pitchFamily="34" charset="0"/>
+                <a:ea typeface="Arial" pitchFamily="34" charset="-122"/>
+                <a:cs typeface="Arial" pitchFamily="34" charset="-120"/>
+              </a:rPr>
+              <a:t> (I, 1 a 3) canta «os barões assinalados»; o </a:t>
+            </a:r>
+            <a:pPr indent="0" marL="0">
+              <a:lnSpc>
+                <a:spcPct val="105000"/>
+              </a:lnSpc>
+              <a:buNone/>
+            </a:pPr>
+            <a:r>
+              <a:rPr lang="en-US" sz="2200" i="1" dirty="0">
+                <a:solidFill>
+                  <a:srgbClr val="F2F0EA"/>
+                </a:solidFill>
+                <a:latin typeface="Arial" pitchFamily="34" charset="0"/>
+                <a:ea typeface="Arial" pitchFamily="34" charset="-122"/>
+                <a:cs typeface="Arial" pitchFamily="34" charset="-120"/>
+              </a:rPr>
+              <a:t>Kit</a:t>
+            </a:r>
+            <a:pPr indent="0" marL="0">
+              <a:lnSpc>
+                <a:spcPct val="105000"/>
+              </a:lnSpc>
+              <a:buNone/>
+            </a:pPr>
+            <a:r>
+              <a:rPr lang="en-US" sz="2200" dirty="0">
+                <a:solidFill>
+                  <a:srgbClr val="F2F0EA"/>
+                </a:solidFill>
+                <a:latin typeface="Arial" pitchFamily="34" charset="0"/>
+                <a:ea typeface="Arial" pitchFamily="34" charset="-122"/>
+                <a:cs typeface="Arial" pitchFamily="34" charset="-120"/>
+              </a:rPr>
+              <a:t>, com objetos inventados e ironia, mostra quem fica sem nome nem voz.</a:t>
             </a:r>
             <a:endParaRPr lang="en-US" sz="2200" dirty="0"/>
           </a:p>
@@ -5874,7 +6066,35 @@
                           <a:ea typeface="Arial" pitchFamily="34" charset="-122"/>
                           <a:cs typeface="Arial" pitchFamily="34" charset="-120"/>
                         </a:rPr>
-                        <a:t>O QUE O KIT MOSTRA OU PERGUNTA</a:t>
+                        <a:t>O QUE O </a:t>
+                      </a:r>
+                      <a:pPr indent="0" marL="0">
+                        <a:buNone/>
+                      </a:pPr>
+                      <a:r>
+                        <a:rPr lang="en-US" sz="1100" b="1" i="1" spc="150" kern="0" dirty="0">
+                          <a:solidFill>
+                            <a:srgbClr val="A9A79F"/>
+                          </a:solidFill>
+                          <a:latin typeface="Arial" pitchFamily="34" charset="0"/>
+                          <a:ea typeface="Arial" pitchFamily="34" charset="-122"/>
+                          <a:cs typeface="Arial" pitchFamily="34" charset="-120"/>
+                        </a:rPr>
+                        <a:t>KIT</a:t>
+                      </a:r>
+                      <a:pPr indent="0" marL="0">
+                        <a:buNone/>
+                      </a:pPr>
+                      <a:r>
+                        <a:rPr lang="en-US" sz="1100" b="1" spc="150" kern="0" dirty="0">
+                          <a:solidFill>
+                            <a:srgbClr val="A9A79F"/>
+                          </a:solidFill>
+                          <a:latin typeface="Arial" pitchFamily="34" charset="0"/>
+                          <a:ea typeface="Arial" pitchFamily="34" charset="-122"/>
+                          <a:cs typeface="Arial" pitchFamily="34" charset="-120"/>
+                        </a:rPr>
+                        <a:t> MOSTRA OU PERGUNTA</a:t>
                       </a:r>
                       <a:endParaRPr lang="en-US" sz="1100" dirty="0">
                         <a:latin typeface="Arial" charset="0"/>
